--- a/PPT/Transformer_Project_PPT.pptx
+++ b/PPT/Transformer_Project_PPT.pptx
@@ -7261,6 +7261,51 @@
                 <a:latin typeface="Microsoft YaHei"/>
               </a:rPr>
               <a:t>????????????????GitHub: github.com/GuoDragon/DeepLearning_Transformer</a:t>
+            </a:r>
+          </a:p>
+        </p:txBody>
+      </p:sp>
+      <p:sp>
+        <p:nvSpPr>
+          <p:cNvPr id="13" name="TextBox 12"/>
+          <p:cNvSpPr txBox="1"/>
+          <p:nvPr/>
+        </p:nvSpPr>
+        <p:spPr>
+          <a:xfrm>
+            <a:off x="548640" y="5989320"/>
+            <a:ext cx="10972800" cy="594360"/>
+          </a:xfrm>
+          <a:prstGeom prst="rect">
+            <a:avLst/>
+          </a:prstGeom>
+          <a:noFill/>
+        </p:spPr>
+        <p:txBody>
+          <a:bodyPr wrap="none">
+            <a:spAutoFit/>
+          </a:bodyPr>
+          <a:lstStyle/>
+          <a:p>
+            <a:r>
+              <a:rPr sz="1300" b="1">
+                <a:solidFill>
+                  <a:srgbClr val="FFFFFF"/>
+                </a:solidFill>
+                <a:latin typeface="Microsoft YaHei"/>
+              </a:rPr>
+              <a:t>小组成员：刘承龙、韩玉轩、潘旭</a:t>
+            </a:r>
+          </a:p>
+          <a:p>
+            <a:r>
+              <a:rPr sz="900">
+                <a:solidFill>
+                  <a:srgbClr val="E6EEFF"/>
+                </a:solidFill>
+                <a:latin typeface="Microsoft YaHei"/>
+              </a:rPr>
+              <a:t>分工：刘承龙-汇总/代码整理/PPT讲解；韩玉轩-代码编写与运行；潘旭-PPT制作</a:t>
             </a:r>
           </a:p>
         </p:txBody>

--- a/PPT/Transformer_Project_PPT.pptx
+++ b/PPT/Transformer_Project_PPT.pptx
@@ -252,7 +252,7 @@
           <a:p>
             <a:fld id="{D2A48B96-639E-45A3-A0BA-2464DFDB1FAA}" type="datetimeFigureOut">
               <a:rPr lang="zh-CN" altLang="en-US" smtClean="0"/>
-              <a:t>2026/5/31</a:t>
+              <a:t>2026/6/1</a:t>
             </a:fld>
             <a:endParaRPr lang="zh-CN" altLang="en-US"/>
           </a:p>
@@ -4167,7 +4167,7 @@
           <a:p>
             <a:fld id="{760FBDFE-C587-4B4C-A407-44438C67B59E}" type="datetimeFigureOut">
               <a:rPr lang="zh-CN" altLang="en-US" smtClean="0"/>
-              <a:t>2026/5/31</a:t>
+              <a:t>2026/6/1</a:t>
             </a:fld>
             <a:endParaRPr lang="zh-CN" altLang="en-US"/>
           </a:p>
@@ -4266,7 +4266,7 @@
           <a:p>
             <a:fld id="{760FBDFE-C587-4B4C-A407-44438C67B59E}" type="datetimeFigureOut">
               <a:rPr lang="zh-CN" altLang="en-US" smtClean="0"/>
-              <a:t>2026/5/31</a:t>
+              <a:t>2026/6/1</a:t>
             </a:fld>
             <a:endParaRPr lang="zh-CN" altLang="en-US"/>
           </a:p>
@@ -4424,7 +4424,7 @@
           <a:p>
             <a:fld id="{760FBDFE-C587-4B4C-A407-44438C67B59E}" type="datetimeFigureOut">
               <a:rPr lang="zh-CN" altLang="en-US" smtClean="0"/>
-              <a:t>2026/5/31</a:t>
+              <a:t>2026/6/1</a:t>
             </a:fld>
             <a:endParaRPr lang="zh-CN" altLang="en-US"/>
           </a:p>
@@ -4695,7 +4695,7 @@
           <a:p>
             <a:fld id="{760FBDFE-C587-4B4C-A407-44438C67B59E}" type="datetimeFigureOut">
               <a:rPr lang="zh-CN" altLang="en-US" smtClean="0"/>
-              <a:t>2026/5/31</a:t>
+              <a:t>2026/6/1</a:t>
             </a:fld>
             <a:endParaRPr lang="zh-CN" altLang="en-US"/>
           </a:p>
@@ -4955,7 +4955,7 @@
           <a:p>
             <a:fld id="{760FBDFE-C587-4B4C-A407-44438C67B59E}" type="datetimeFigureOut">
               <a:rPr lang="zh-CN" altLang="en-US" smtClean="0"/>
-              <a:t>2026/5/31</a:t>
+              <a:t>2026/6/1</a:t>
             </a:fld>
             <a:endParaRPr lang="zh-CN" altLang="en-US"/>
           </a:p>
@@ -5209,7 +5209,7 @@
           <a:p>
             <a:fld id="{760FBDFE-C587-4B4C-A407-44438C67B59E}" type="datetimeFigureOut">
               <a:rPr lang="zh-CN" altLang="en-US" smtClean="0"/>
-              <a:t>2026/5/31</a:t>
+              <a:t>2026/6/1</a:t>
             </a:fld>
             <a:endParaRPr lang="zh-CN" altLang="en-US"/>
           </a:p>
@@ -5623,7 +5623,7 @@
           <a:p>
             <a:fld id="{760FBDFE-C587-4B4C-A407-44438C67B59E}" type="datetimeFigureOut">
               <a:rPr lang="zh-CN" altLang="en-US" smtClean="0"/>
-              <a:t>2026/5/31</a:t>
+              <a:t>2026/6/1</a:t>
             </a:fld>
             <a:endParaRPr lang="zh-CN" altLang="en-US"/>
           </a:p>
@@ -5755,7 +5755,7 @@
           <a:p>
             <a:fld id="{760FBDFE-C587-4B4C-A407-44438C67B59E}" type="datetimeFigureOut">
               <a:rPr lang="zh-CN" altLang="en-US" smtClean="0"/>
-              <a:t>2026/5/31</a:t>
+              <a:t>2026/6/1</a:t>
             </a:fld>
             <a:endParaRPr lang="zh-CN" altLang="en-US"/>
           </a:p>
@@ -5854,7 +5854,7 @@
           <a:p>
             <a:fld id="{760FBDFE-C587-4B4C-A407-44438C67B59E}" type="datetimeFigureOut">
               <a:rPr lang="zh-CN" altLang="en-US" smtClean="0"/>
-              <a:t>2026/5/31</a:t>
+              <a:t>2026/6/1</a:t>
             </a:fld>
             <a:endParaRPr lang="zh-CN" altLang="en-US"/>
           </a:p>
@@ -6026,7 +6026,7 @@
           <a:p>
             <a:fld id="{9EFD9D74-47D9-4702-A33C-335B63B48DBF}" type="datetimeFigureOut">
               <a:rPr lang="zh-CN" altLang="en-US" smtClean="0"/>
-              <a:t>2026/5/31</a:t>
+              <a:t>2026/6/1</a:t>
             </a:fld>
             <a:endParaRPr lang="zh-CN" altLang="en-US" dirty="0"/>
           </a:p>
@@ -6266,7 +6266,7 @@
           <a:p>
             <a:fld id="{760FBDFE-C587-4B4C-A407-44438C67B59E}" type="datetimeFigureOut">
               <a:rPr lang="zh-CN" altLang="en-US" smtClean="0"/>
-              <a:t>2026/5/31</a:t>
+              <a:t>2026/6/1</a:t>
             </a:fld>
             <a:endParaRPr lang="zh-CN" altLang="en-US"/>
           </a:p>
@@ -6502,7 +6502,7 @@
           <a:p>
             <a:fld id="{760FBDFE-C587-4B4C-A407-44438C67B59E}" type="datetimeFigureOut">
               <a:rPr lang="zh-CN" altLang="en-US" smtClean="0"/>
-              <a:t>2026/5/31</a:t>
+              <a:t>2026/6/1</a:t>
             </a:fld>
             <a:endParaRPr lang="zh-CN" altLang="en-US"/>
           </a:p>
@@ -7233,14 +7233,14 @@
       </p:pic>
       <p:sp>
         <p:nvSpPr>
-          <p:cNvPr id="12" name="TextBox 11"/>
+          <p:cNvPr id="13" name="TextBox 12"/>
           <p:cNvSpPr txBox="1"/>
           <p:nvPr/>
         </p:nvSpPr>
         <p:spPr>
           <a:xfrm>
-            <a:off x="731520" y="5394960"/>
-            <a:ext cx="10698480" cy="502920"/>
+            <a:off x="379307" y="4017645"/>
+            <a:ext cx="6603090" cy="677108"/>
           </a:xfrm>
           <a:prstGeom prst="rect">
             <a:avLst/>
@@ -7254,41 +7254,7 @@
           <a:lstStyle/>
           <a:p>
             <a:r>
-              <a:rPr sz="1600">
-                <a:solidFill>
-                  <a:srgbClr val="505050"/>
-                </a:solidFill>
-                <a:latin typeface="Microsoft YaHei"/>
-              </a:rPr>
-              <a:t>????????????????GitHub: github.com/GuoDragon/DeepLearning_Transformer</a:t>
-            </a:r>
-          </a:p>
-        </p:txBody>
-      </p:sp>
-      <p:sp>
-        <p:nvSpPr>
-          <p:cNvPr id="13" name="TextBox 12"/>
-          <p:cNvSpPr txBox="1"/>
-          <p:nvPr/>
-        </p:nvSpPr>
-        <p:spPr>
-          <a:xfrm>
-            <a:off x="548640" y="5989320"/>
-            <a:ext cx="10972800" cy="594360"/>
-          </a:xfrm>
-          <a:prstGeom prst="rect">
-            <a:avLst/>
-          </a:prstGeom>
-          <a:noFill/>
-        </p:spPr>
-        <p:txBody>
-          <a:bodyPr wrap="none">
-            <a:spAutoFit/>
-          </a:bodyPr>
-          <a:lstStyle/>
-          <a:p>
-            <a:r>
-              <a:rPr sz="1300" b="1">
+              <a:rPr sz="2400" b="1" dirty="0" err="1">
                 <a:solidFill>
                   <a:srgbClr val="FFFFFF"/>
                 </a:solidFill>
@@ -7296,17 +7262,65 @@
               </a:rPr>
               <a:t>小组成员：刘承龙、韩玉轩、潘旭</a:t>
             </a:r>
+            <a:endParaRPr sz="2400" b="1" dirty="0">
+              <a:solidFill>
+                <a:srgbClr val="FFFFFF"/>
+              </a:solidFill>
+              <a:latin typeface="Microsoft YaHei"/>
+            </a:endParaRPr>
           </a:p>
           <a:p>
             <a:r>
-              <a:rPr sz="900">
+              <a:rPr sz="1400" dirty="0" err="1">
                 <a:solidFill>
                   <a:srgbClr val="E6EEFF"/>
                 </a:solidFill>
                 <a:latin typeface="Microsoft YaHei"/>
               </a:rPr>
-              <a:t>分工：刘承龙-汇总/代码整理/PPT讲解；韩玉轩-代码编写与运行；潘旭-PPT制作</a:t>
-            </a:r>
+              <a:t>分工：刘承龙-汇总</a:t>
+            </a:r>
+            <a:r>
+              <a:rPr sz="1400" dirty="0">
+                <a:solidFill>
+                  <a:srgbClr val="E6EEFF"/>
+                </a:solidFill>
+                <a:latin typeface="Microsoft YaHei"/>
+              </a:rPr>
+              <a:t>/</a:t>
+            </a:r>
+            <a:r>
+              <a:rPr sz="1400" dirty="0" err="1">
+                <a:solidFill>
+                  <a:srgbClr val="E6EEFF"/>
+                </a:solidFill>
+                <a:latin typeface="Microsoft YaHei"/>
+              </a:rPr>
+              <a:t>代码整理</a:t>
+            </a:r>
+            <a:r>
+              <a:rPr sz="1400" dirty="0">
+                <a:solidFill>
+                  <a:srgbClr val="E6EEFF"/>
+                </a:solidFill>
+                <a:latin typeface="Microsoft YaHei"/>
+              </a:rPr>
+              <a:t>/</a:t>
+            </a:r>
+            <a:r>
+              <a:rPr sz="1400" dirty="0" err="1">
+                <a:solidFill>
+                  <a:srgbClr val="E6EEFF"/>
+                </a:solidFill>
+                <a:latin typeface="Microsoft YaHei"/>
+              </a:rPr>
+              <a:t>PPT讲解；韩玉轩-代码编写与运行；潘旭-PPT制作</a:t>
+            </a:r>
+            <a:endParaRPr sz="1400" dirty="0">
+              <a:solidFill>
+                <a:srgbClr val="E6EEFF"/>
+              </a:solidFill>
+              <a:latin typeface="Microsoft YaHei"/>
+            </a:endParaRPr>
           </a:p>
         </p:txBody>
       </p:sp>
@@ -7794,31 +7808,7 @@
                   <a:cs typeface="宋体" panose="02010600030101010101" pitchFamily="2" charset="-122"/>
                   <a:sym typeface="+mn-ea"/>
                 </a:rPr>
-                <a:t>次（</a:t>
-              </a:r>
-              <a:r>
-                <a:rPr lang="en-US" altLang="zh-CN" sz="2000" b="1" dirty="0">
-                  <a:solidFill>
-                    <a:srgbClr val="2E6A70"/>
-                  </a:solidFill>
-                  <a:latin typeface="宋体" panose="02010600030101010101" pitchFamily="2" charset="-122"/>
-                  <a:ea typeface="宋体" panose="02010600030101010101" pitchFamily="2" charset="-122"/>
-                  <a:cs typeface="宋体" panose="02010600030101010101" pitchFamily="2" charset="-122"/>
-                  <a:sym typeface="+mn-ea"/>
-                </a:rPr>
-                <a:t>h=8</a:t>
-              </a:r>
-              <a:r>
-                <a:rPr lang="zh-CN" altLang="en-US" sz="2000" b="1" dirty="0">
-                  <a:solidFill>
-                    <a:srgbClr val="2E6A70"/>
-                  </a:solidFill>
-                  <a:latin typeface="宋体" panose="02010600030101010101" pitchFamily="2" charset="-122"/>
-                  <a:ea typeface="宋体" panose="02010600030101010101" pitchFamily="2" charset="-122"/>
-                  <a:cs typeface="宋体" panose="02010600030101010101" pitchFamily="2" charset="-122"/>
-                  <a:sym typeface="+mn-ea"/>
-                </a:rPr>
-                <a:t>）</a:t>
+                <a:t>次</a:t>
               </a:r>
             </a:p>
             <a:p>
@@ -12125,30 +12115,6 @@
                 <a:cs typeface="宋体" panose="02010600030101010101" pitchFamily="2" charset="-122"/>
                 <a:sym typeface="+mn-ea"/>
               </a:rPr>
-              <a:t>、</a:t>
-            </a:r>
-            <a:r>
-              <a:rPr lang="en-US" altLang="zh-CN" dirty="0">
-                <a:solidFill>
-                  <a:srgbClr val="2E6A70"/>
-                </a:solidFill>
-                <a:latin typeface="宋体" panose="02010600030101010101" pitchFamily="2" charset="-122"/>
-                <a:ea typeface="宋体" panose="02010600030101010101" pitchFamily="2" charset="-122"/>
-                <a:cs typeface="宋体" panose="02010600030101010101" pitchFamily="2" charset="-122"/>
-                <a:sym typeface="+mn-ea"/>
-              </a:rPr>
-              <a:t>T5 </a:t>
-            </a:r>
-            <a:r>
-              <a:rPr lang="zh-CN" altLang="en-US" dirty="0">
-                <a:solidFill>
-                  <a:srgbClr val="2E6A70"/>
-                </a:solidFill>
-                <a:latin typeface="宋体" panose="02010600030101010101" pitchFamily="2" charset="-122"/>
-                <a:ea typeface="宋体" panose="02010600030101010101" pitchFamily="2" charset="-122"/>
-                <a:cs typeface="宋体" panose="02010600030101010101" pitchFamily="2" charset="-122"/>
-                <a:sym typeface="+mn-ea"/>
-              </a:rPr>
               <a:t>等所有大模型的基础</a:t>
             </a:r>
           </a:p>
@@ -25977,7 +25943,7 @@
         <p:spPr>
           <a:xfrm>
             <a:off x="669924" y="337065"/>
-            <a:ext cx="4990096" cy="584775"/>
+            <a:ext cx="6848476" cy="584775"/>
           </a:xfrm>
           <a:prstGeom prst="rect">
             <a:avLst/>
@@ -26002,6 +25968,58 @@
                 <a:sym typeface="+mn-lt"/>
               </a:rPr>
               <a:t>Transformer  vs  RNN</a:t>
+            </a:r>
+            <a:r>
+              <a:rPr lang="zh-CN" altLang="en-US" sz="3200" b="1" dirty="0">
+                <a:solidFill>
+                  <a:schemeClr val="tx1">
+                    <a:lumMod val="75000"/>
+                    <a:lumOff val="25000"/>
+                  </a:schemeClr>
+                </a:solidFill>
+                <a:cs typeface="+mn-ea"/>
+                <a:sym typeface="+mn-lt"/>
+              </a:rPr>
+              <a:t> </a:t>
+            </a:r>
+            <a:r>
+              <a:rPr lang="en-US" altLang="zh-CN" sz="3200" b="1" dirty="0">
+                <a:solidFill>
+                  <a:schemeClr val="tx1">
+                    <a:lumMod val="75000"/>
+                    <a:lumOff val="25000"/>
+                  </a:schemeClr>
+                </a:solidFill>
+                <a:cs typeface="+mn-ea"/>
+                <a:sym typeface="+mn-lt"/>
+              </a:rPr>
+              <a:t>/</a:t>
+            </a:r>
+            <a:r>
+              <a:rPr lang="zh-CN" altLang="en-US" sz="3200" b="1" dirty="0">
+                <a:solidFill>
+                  <a:schemeClr val="tx1">
+                    <a:lumMod val="75000"/>
+                    <a:lumOff val="25000"/>
+                  </a:schemeClr>
+                </a:solidFill>
+                <a:cs typeface="+mn-ea"/>
+                <a:sym typeface="+mn-lt"/>
+              </a:rPr>
+              <a:t> </a:t>
+            </a:r>
+            <a:r>
+              <a:rPr lang="en-US" altLang="zh-CN" sz="3200" b="1" dirty="0">
+                <a:solidFill>
+                  <a:schemeClr val="tx1">
+                    <a:lumMod val="75000"/>
+                    <a:lumOff val="25000"/>
+                  </a:schemeClr>
+                </a:solidFill>
+                <a:cs typeface="+mn-ea"/>
+                <a:sym typeface="+mn-lt"/>
+              </a:rPr>
+              <a:t>LSTM</a:t>
             </a:r>
             <a:r>
               <a:rPr lang="en-US" altLang="zh-CN" sz="3200" b="1" spc="600" dirty="0">
